--- a/Gemini_showcase_presentation/Pablo_Bernabeu.pptx
+++ b/Gemini_showcase_presentation/Pablo_Bernabeu.pptx
@@ -165,7 +165,7 @@
 <file path=ppt/revisionInfo.xml><?xml version="1.0" encoding="utf-8"?>
 <p1510:revInfo xmlns:a="http://schemas.openxmlformats.org/drawingml/2006/main" xmlns:r="http://schemas.openxmlformats.org/officeDocument/2006/relationships" xmlns:p1510="http://schemas.microsoft.com/office/powerpoint/2015/10/main">
   <p1510:revLst>
-    <p1510:client id="{CA0E3F24-3540-434E-B16D-7BD1819612DF}" v="26" dt="2025-11-20T07:00:49.490"/>
+    <p1510:client id="{CA0E3F24-3540-434E-B16D-7BD1819612DF}" v="48" dt="2025-11-20T07:50:16.368"/>
   </p1510:revLst>
 </p1510:revInfo>
 </file>
@@ -175,7 +175,7 @@
   <pc:docChgLst>
     <pc:chgData name="Pablo de Juan Bernabeu" userId="c2010ea5-995f-460d-8ec3-ab1cecfcbff4" providerId="ADAL" clId="{72FD2D7A-BC6E-40F6-A002-FFB6E1DDCAB2}"/>
     <pc:docChg chg="undo redo custSel addSld delSld modSld">
-      <pc:chgData name="Pablo de Juan Bernabeu" userId="c2010ea5-995f-460d-8ec3-ab1cecfcbff4" providerId="ADAL" clId="{72FD2D7A-BC6E-40F6-A002-FFB6E1DDCAB2}" dt="2025-11-20T07:21:40.362" v="3114" actId="20577"/>
+      <pc:chgData name="Pablo de Juan Bernabeu" userId="c2010ea5-995f-460d-8ec3-ab1cecfcbff4" providerId="ADAL" clId="{72FD2D7A-BC6E-40F6-A002-FFB6E1DDCAB2}" dt="2025-11-20T07:50:16.368" v="3347"/>
       <pc:docMkLst>
         <pc:docMk/>
       </pc:docMkLst>
@@ -340,14 +340,14 @@
           </ac:picMkLst>
         </pc:picChg>
       </pc:sldChg>
-      <pc:sldChg chg="addSp delSp modSp mod">
-        <pc:chgData name="Pablo de Juan Bernabeu" userId="c2010ea5-995f-460d-8ec3-ab1cecfcbff4" providerId="ADAL" clId="{72FD2D7A-BC6E-40F6-A002-FFB6E1DDCAB2}" dt="2025-11-20T07:21:40.362" v="3114" actId="20577"/>
+      <pc:sldChg chg="addSp delSp modSp mod modAnim">
+        <pc:chgData name="Pablo de Juan Bernabeu" userId="c2010ea5-995f-460d-8ec3-ab1cecfcbff4" providerId="ADAL" clId="{72FD2D7A-BC6E-40F6-A002-FFB6E1DDCAB2}" dt="2025-11-20T07:50:16.368" v="3347"/>
         <pc:sldMkLst>
           <pc:docMk/>
           <pc:sldMk cId="286204094" sldId="267"/>
         </pc:sldMkLst>
         <pc:spChg chg="mod">
-          <ac:chgData name="Pablo de Juan Bernabeu" userId="c2010ea5-995f-460d-8ec3-ab1cecfcbff4" providerId="ADAL" clId="{72FD2D7A-BC6E-40F6-A002-FFB6E1DDCAB2}" dt="2025-11-20T07:02:09.325" v="2195" actId="20577"/>
+          <ac:chgData name="Pablo de Juan Bernabeu" userId="c2010ea5-995f-460d-8ec3-ab1cecfcbff4" providerId="ADAL" clId="{72FD2D7A-BC6E-40F6-A002-FFB6E1DDCAB2}" dt="2025-11-20T07:46:43.970" v="3330" actId="20577"/>
           <ac:spMkLst>
             <pc:docMk/>
             <pc:sldMk cId="286204094" sldId="267"/>
@@ -355,7 +355,7 @@
           </ac:spMkLst>
         </pc:spChg>
         <pc:spChg chg="mod">
-          <ac:chgData name="Pablo de Juan Bernabeu" userId="c2010ea5-995f-460d-8ec3-ab1cecfcbff4" providerId="ADAL" clId="{72FD2D7A-BC6E-40F6-A002-FFB6E1DDCAB2}" dt="2025-11-20T07:21:40.362" v="3114" actId="20577"/>
+          <ac:chgData name="Pablo de Juan Bernabeu" userId="c2010ea5-995f-460d-8ec3-ab1cecfcbff4" providerId="ADAL" clId="{72FD2D7A-BC6E-40F6-A002-FFB6E1DDCAB2}" dt="2025-11-20T07:47:53.767" v="3332" actId="207"/>
           <ac:spMkLst>
             <pc:docMk/>
             <pc:sldMk cId="286204094" sldId="267"/>
@@ -363,7 +363,7 @@
           </ac:spMkLst>
         </pc:spChg>
         <pc:spChg chg="mod">
-          <ac:chgData name="Pablo de Juan Bernabeu" userId="c2010ea5-995f-460d-8ec3-ab1cecfcbff4" providerId="ADAL" clId="{72FD2D7A-BC6E-40F6-A002-FFB6E1DDCAB2}" dt="2025-11-20T06:43:39.330" v="1686" actId="14100"/>
+          <ac:chgData name="Pablo de Juan Bernabeu" userId="c2010ea5-995f-460d-8ec3-ab1cecfcbff4" providerId="ADAL" clId="{72FD2D7A-BC6E-40F6-A002-FFB6E1DDCAB2}" dt="2025-11-20T07:45:27.471" v="3328" actId="1037"/>
           <ac:spMkLst>
             <pc:docMk/>
             <pc:sldMk cId="286204094" sldId="267"/>
@@ -384,6 +384,22 @@
             <pc:docMk/>
             <pc:sldMk cId="286204094" sldId="267"/>
             <ac:picMk id="7" creationId="{DD3F5776-A761-1CDA-E6E3-AAB7E840067C}"/>
+          </ac:picMkLst>
+        </pc:picChg>
+        <pc:picChg chg="add mod">
+          <ac:chgData name="Pablo de Juan Bernabeu" userId="c2010ea5-995f-460d-8ec3-ab1cecfcbff4" providerId="ADAL" clId="{72FD2D7A-BC6E-40F6-A002-FFB6E1DDCAB2}" dt="2025-11-20T07:40:45.939" v="3248" actId="207"/>
+          <ac:picMkLst>
+            <pc:docMk/>
+            <pc:sldMk cId="286204094" sldId="267"/>
+            <ac:picMk id="10" creationId="{61DDFF70-1664-82BF-1CDF-FFE1166FD7EA}"/>
+          </ac:picMkLst>
+        </pc:picChg>
+        <pc:picChg chg="add mod">
+          <ac:chgData name="Pablo de Juan Bernabeu" userId="c2010ea5-995f-460d-8ec3-ab1cecfcbff4" providerId="ADAL" clId="{72FD2D7A-BC6E-40F6-A002-FFB6E1DDCAB2}" dt="2025-11-20T07:47:38.780" v="3331" actId="207"/>
+          <ac:picMkLst>
+            <pc:docMk/>
+            <pc:sldMk cId="286204094" sldId="267"/>
+            <ac:picMk id="12" creationId="{2FDFA1CD-2627-DA1A-D4EB-8B7C8C578B20}"/>
           </ac:picMkLst>
         </pc:picChg>
       </pc:sldChg>
@@ -5982,9 +5998,20 @@
               <a:rPr lang="en-GB" dirty="0"/>
             </a:br>
             <a:br>
-              <a:rPr lang="en-GB" dirty="0"/>
+              <a:rPr lang="en-GB" sz="4800" dirty="0"/>
             </a:br>
             <a:r>
+              <a:rPr lang="en-GB" sz="3200" i="1" dirty="0">
+                <a:solidFill>
+                  <a:schemeClr val="accent3">
+                    <a:lumMod val="40000"/>
+                    <a:lumOff val="60000"/>
+                  </a:schemeClr>
+                </a:solidFill>
+              </a:rPr>
+              <a:t>Stay hungry, stay foolish</a:t>
+            </a:r>
+            <a:br>
               <a:rPr lang="en-GB" sz="3200" i="1" dirty="0">
                 <a:solidFill>
                   <a:schemeClr val="tx2">
@@ -5993,8 +6020,15 @@
                   </a:schemeClr>
                 </a:solidFill>
               </a:rPr>
-              <a:t>Stay hungry, stay foolish</a:t>
-            </a:r>
+            </a:br>
+            <a:endParaRPr lang="en-GB" sz="3200" i="1" dirty="0">
+              <a:solidFill>
+                <a:schemeClr val="tx2">
+                  <a:lumMod val="25000"/>
+                  <a:lumOff val="75000"/>
+                </a:schemeClr>
+              </a:solidFill>
+            </a:endParaRPr>
           </a:p>
         </p:txBody>
       </p:sp>
@@ -6014,31 +6048,48 @@
             <p:ph type="body" sz="quarter" idx="10"/>
           </p:nvPr>
         </p:nvSpPr>
-        <p:spPr/>
+        <p:spPr>
+          <a:xfrm>
+            <a:off x="4139952" y="1989666"/>
+            <a:ext cx="4464496" cy="2556934"/>
+          </a:xfrm>
+        </p:spPr>
         <p:txBody>
           <a:bodyPr/>
           <a:lstStyle/>
           <a:p>
-            <a:endParaRPr lang="en-GB" sz="1600" dirty="0"/>
-          </a:p>
-          <a:p>
-            <a:endParaRPr lang="en-GB" sz="1600" dirty="0"/>
-          </a:p>
-          <a:p>
-            <a:endParaRPr lang="en-GB" sz="1600" dirty="0"/>
+            <a:r>
+              <a:rPr lang="en-GB" sz="2100" dirty="0"/>
+              <a:t>https://github.com/pablobernabeu/ </a:t>
+            </a:r>
+            <a:r>
+              <a:rPr lang="en-GB" sz="2100" dirty="0" err="1"/>
+              <a:t>Gemini_literature_review_workflow</a:t>
+            </a:r>
+            <a:endParaRPr lang="en-GB" sz="2100" dirty="0"/>
+          </a:p>
+          <a:p>
+            <a:endParaRPr lang="en-GB" sz="2400" dirty="0"/>
+          </a:p>
+          <a:p>
+            <a:endParaRPr lang="en-GB" sz="100" dirty="0"/>
           </a:p>
           <a:p>
             <a:r>
               <a:rPr lang="en-GB" sz="1800" b="1" dirty="0">
                 <a:solidFill>
-                  <a:srgbClr val="00B050"/>
+                  <a:schemeClr val="accent3">
+                    <a:lumMod val="75000"/>
+                  </a:schemeClr>
                 </a:solidFill>
               </a:rPr>
-              <a:t>Unprecedented role of individuals</a:t>
+              <a:t>Unprecedented individual role in AI</a:t>
             </a:r>
             <a:endParaRPr lang="en-GB" sz="1600" b="1" dirty="0">
               <a:solidFill>
-                <a:srgbClr val="00B050"/>
+                <a:schemeClr val="accent3">
+                  <a:lumMod val="75000"/>
+                </a:schemeClr>
               </a:solidFill>
             </a:endParaRPr>
           </a:p>
@@ -6049,15 +6100,7 @@
             </a:r>
             <a:r>
               <a:rPr lang="en-GB" sz="1600" dirty="0"/>
-              <a:t>are rapidly</a:t>
-            </a:r>
-            <a:r>
-              <a:rPr lang="en-GB" sz="1600" b="1" dirty="0"/>
-              <a:t> improving </a:t>
-            </a:r>
-            <a:r>
-              <a:rPr lang="en-GB" sz="1600" dirty="0"/>
-              <a:t>thanks to projects big and small, including individual attempts shared openly. </a:t>
+              <a:t>are multiplying and improving thanks to projects big and small, including modest, individual attempts. </a:t>
             </a:r>
           </a:p>
         </p:txBody>
@@ -6076,7 +6119,7 @@
         </p:nvSpPr>
         <p:spPr>
           <a:xfrm rot="10800000">
-            <a:off x="67732" y="3166312"/>
+            <a:off x="59265" y="2980045"/>
             <a:ext cx="2713567" cy="1634285"/>
           </a:xfrm>
           <a:prstGeom prst="wedgeEllipseCallout">
@@ -6120,6 +6163,79 @@
           </a:p>
         </p:txBody>
       </p:sp>
+      <p:pic>
+        <p:nvPicPr>
+          <p:cNvPr id="10" name="Graphic 9">
+            <a:hlinkClick r:id="rId2"/>
+            <a:extLst>
+              <a:ext uri="{FF2B5EF4-FFF2-40B4-BE49-F238E27FC236}">
+                <a16:creationId xmlns:a16="http://schemas.microsoft.com/office/drawing/2014/main" id="{61DDFF70-1664-82BF-1CDF-FFE1166FD7EA}"/>
+              </a:ext>
+            </a:extLst>
+          </p:cNvPr>
+          <p:cNvPicPr>
+            <a:picLocks noChangeAspect="1"/>
+          </p:cNvPicPr>
+          <p:nvPr/>
+        </p:nvPicPr>
+        <p:blipFill>
+          <a:blip r:embed="rId3">
+            <a:extLst>
+              <a:ext uri="{96DAC541-7B7A-43D3-8B79-37D633B846F1}">
+                <asvg:svgBlip xmlns:asvg="http://schemas.microsoft.com/office/drawing/2016/SVG/main" r:embed="rId4"/>
+              </a:ext>
+            </a:extLst>
+          </a:blip>
+          <a:stretch>
+            <a:fillRect/>
+          </a:stretch>
+        </p:blipFill>
+        <p:spPr>
+          <a:xfrm rot="748528">
+            <a:off x="5877958" y="726013"/>
+            <a:ext cx="988483" cy="988483"/>
+          </a:xfrm>
+          <a:prstGeom prst="rect">
+            <a:avLst/>
+          </a:prstGeom>
+        </p:spPr>
+      </p:pic>
+      <p:pic>
+        <p:nvPicPr>
+          <p:cNvPr id="12" name="Graphic 11" descr="Cursor with solid fill">
+            <a:extLst>
+              <a:ext uri="{FF2B5EF4-FFF2-40B4-BE49-F238E27FC236}">
+                <a16:creationId xmlns:a16="http://schemas.microsoft.com/office/drawing/2014/main" id="{2FDFA1CD-2627-DA1A-D4EB-8B7C8C578B20}"/>
+              </a:ext>
+            </a:extLst>
+          </p:cNvPr>
+          <p:cNvPicPr>
+            <a:picLocks noChangeAspect="1"/>
+          </p:cNvPicPr>
+          <p:nvPr/>
+        </p:nvPicPr>
+        <p:blipFill>
+          <a:blip r:embed="rId5">
+            <a:extLst>
+              <a:ext uri="{96DAC541-7B7A-43D3-8B79-37D633B846F1}">
+                <asvg:svgBlip xmlns:asvg="http://schemas.microsoft.com/office/drawing/2016/SVG/main" r:embed="rId6"/>
+              </a:ext>
+            </a:extLst>
+          </a:blip>
+          <a:stretch>
+            <a:fillRect/>
+          </a:stretch>
+        </p:blipFill>
+        <p:spPr>
+          <a:xfrm>
+            <a:off x="6723940" y="1424433"/>
+            <a:ext cx="475197" cy="475197"/>
+          </a:xfrm>
+          <a:prstGeom prst="rect">
+            <a:avLst/>
+          </a:prstGeom>
+        </p:spPr>
+      </p:pic>
     </p:spTree>
     <p:extLst>
       <p:ext uri="{BB962C8B-B14F-4D97-AF65-F5344CB8AC3E}">
@@ -6130,6 +6246,367 @@
   <p:clrMapOvr>
     <a:masterClrMapping/>
   </p:clrMapOvr>
+  <p:timing>
+    <p:tnLst>
+      <p:par>
+        <p:cTn id="1" dur="indefinite" restart="never" nodeType="tmRoot">
+          <p:childTnLst>
+            <p:seq concurrent="1" nextAc="seek">
+              <p:cTn id="2" dur="indefinite" nodeType="mainSeq">
+                <p:childTnLst>
+                  <p:par>
+                    <p:cTn id="3" fill="hold">
+                      <p:stCondLst>
+                        <p:cond delay="indefinite"/>
+                        <p:cond evt="onBegin" delay="0">
+                          <p:tn val="2"/>
+                        </p:cond>
+                      </p:stCondLst>
+                      <p:childTnLst>
+                        <p:par>
+                          <p:cTn id="4" fill="hold">
+                            <p:stCondLst>
+                              <p:cond delay="0"/>
+                            </p:stCondLst>
+                            <p:childTnLst>
+                              <p:par>
+                                <p:cTn id="5" presetID="10" presetClass="entr" presetSubtype="0" fill="hold" grpId="0" nodeType="withEffect">
+                                  <p:stCondLst>
+                                    <p:cond delay="0"/>
+                                  </p:stCondLst>
+                                  <p:childTnLst>
+                                    <p:set>
+                                      <p:cBhvr>
+                                        <p:cTn id="6" dur="1" fill="hold">
+                                          <p:stCondLst>
+                                            <p:cond delay="0"/>
+                                          </p:stCondLst>
+                                        </p:cTn>
+                                        <p:tgtEl>
+                                          <p:spTgt spid="2"/>
+                                        </p:tgtEl>
+                                        <p:attrNameLst>
+                                          <p:attrName>style.visibility</p:attrName>
+                                        </p:attrNameLst>
+                                      </p:cBhvr>
+                                      <p:to>
+                                        <p:strVal val="visible"/>
+                                      </p:to>
+                                    </p:set>
+                                    <p:animEffect transition="in" filter="fade">
+                                      <p:cBhvr>
+                                        <p:cTn id="7" dur="500"/>
+                                        <p:tgtEl>
+                                          <p:spTgt spid="2"/>
+                                        </p:tgtEl>
+                                      </p:cBhvr>
+                                    </p:animEffect>
+                                  </p:childTnLst>
+                                </p:cTn>
+                              </p:par>
+                              <p:par>
+                                <p:cTn id="8" presetID="10" presetClass="entr" presetSubtype="0" fill="hold" nodeType="withEffect">
+                                  <p:stCondLst>
+                                    <p:cond delay="0"/>
+                                  </p:stCondLst>
+                                  <p:childTnLst>
+                                    <p:set>
+                                      <p:cBhvr>
+                                        <p:cTn id="9" dur="1" fill="hold">
+                                          <p:stCondLst>
+                                            <p:cond delay="0"/>
+                                          </p:stCondLst>
+                                        </p:cTn>
+                                        <p:tgtEl>
+                                          <p:spTgt spid="10"/>
+                                        </p:tgtEl>
+                                        <p:attrNameLst>
+                                          <p:attrName>style.visibility</p:attrName>
+                                        </p:attrNameLst>
+                                      </p:cBhvr>
+                                      <p:to>
+                                        <p:strVal val="visible"/>
+                                      </p:to>
+                                    </p:set>
+                                    <p:animEffect transition="in" filter="fade">
+                                      <p:cBhvr>
+                                        <p:cTn id="10" dur="500"/>
+                                        <p:tgtEl>
+                                          <p:spTgt spid="10"/>
+                                        </p:tgtEl>
+                                      </p:cBhvr>
+                                    </p:animEffect>
+                                  </p:childTnLst>
+                                </p:cTn>
+                              </p:par>
+                              <p:par>
+                                <p:cTn id="11" presetID="10" presetClass="entr" presetSubtype="0" fill="hold" grpId="0" nodeType="withEffect">
+                                  <p:stCondLst>
+                                    <p:cond delay="0"/>
+                                  </p:stCondLst>
+                                  <p:childTnLst>
+                                    <p:set>
+                                      <p:cBhvr>
+                                        <p:cTn id="12" dur="1" fill="hold">
+                                          <p:stCondLst>
+                                            <p:cond delay="0"/>
+                                          </p:stCondLst>
+                                        </p:cTn>
+                                        <p:tgtEl>
+                                          <p:spTgt spid="3">
+                                            <p:txEl>
+                                              <p:pRg st="0" end="0"/>
+                                            </p:txEl>
+                                          </p:spTgt>
+                                        </p:tgtEl>
+                                        <p:attrNameLst>
+                                          <p:attrName>style.visibility</p:attrName>
+                                        </p:attrNameLst>
+                                      </p:cBhvr>
+                                      <p:to>
+                                        <p:strVal val="visible"/>
+                                      </p:to>
+                                    </p:set>
+                                    <p:animEffect transition="in" filter="fade">
+                                      <p:cBhvr>
+                                        <p:cTn id="13" dur="500"/>
+                                        <p:tgtEl>
+                                          <p:spTgt spid="3">
+                                            <p:txEl>
+                                              <p:pRg st="0" end="0"/>
+                                            </p:txEl>
+                                          </p:spTgt>
+                                        </p:tgtEl>
+                                      </p:cBhvr>
+                                    </p:animEffect>
+                                  </p:childTnLst>
+                                </p:cTn>
+                              </p:par>
+                              <p:par>
+                                <p:cTn id="14" presetID="10" presetClass="entr" presetSubtype="0" fill="hold" nodeType="withEffect">
+                                  <p:stCondLst>
+                                    <p:cond delay="0"/>
+                                  </p:stCondLst>
+                                  <p:childTnLst>
+                                    <p:set>
+                                      <p:cBhvr>
+                                        <p:cTn id="15" dur="1" fill="hold">
+                                          <p:stCondLst>
+                                            <p:cond delay="0"/>
+                                          </p:stCondLst>
+                                        </p:cTn>
+                                        <p:tgtEl>
+                                          <p:spTgt spid="12"/>
+                                        </p:tgtEl>
+                                        <p:attrNameLst>
+                                          <p:attrName>style.visibility</p:attrName>
+                                        </p:attrNameLst>
+                                      </p:cBhvr>
+                                      <p:to>
+                                        <p:strVal val="visible"/>
+                                      </p:to>
+                                    </p:set>
+                                    <p:animEffect transition="in" filter="fade">
+                                      <p:cBhvr>
+                                        <p:cTn id="16" dur="500"/>
+                                        <p:tgtEl>
+                                          <p:spTgt spid="12"/>
+                                        </p:tgtEl>
+                                      </p:cBhvr>
+                                    </p:animEffect>
+                                  </p:childTnLst>
+                                </p:cTn>
+                              </p:par>
+                            </p:childTnLst>
+                          </p:cTn>
+                        </p:par>
+                      </p:childTnLst>
+                    </p:cTn>
+                  </p:par>
+                  <p:par>
+                    <p:cTn id="17" fill="hold">
+                      <p:stCondLst>
+                        <p:cond delay="indefinite"/>
+                      </p:stCondLst>
+                      <p:childTnLst>
+                        <p:par>
+                          <p:cTn id="18" fill="hold">
+                            <p:stCondLst>
+                              <p:cond delay="0"/>
+                            </p:stCondLst>
+                            <p:childTnLst>
+                              <p:par>
+                                <p:cTn id="19" presetID="10" presetClass="entr" presetSubtype="0" fill="hold" grpId="0" nodeType="clickEffect">
+                                  <p:stCondLst>
+                                    <p:cond delay="0"/>
+                                  </p:stCondLst>
+                                  <p:childTnLst>
+                                    <p:set>
+                                      <p:cBhvr>
+                                        <p:cTn id="20" dur="1" fill="hold">
+                                          <p:stCondLst>
+                                            <p:cond delay="0"/>
+                                          </p:stCondLst>
+                                        </p:cTn>
+                                        <p:tgtEl>
+                                          <p:spTgt spid="3">
+                                            <p:txEl>
+                                              <p:pRg st="3" end="3"/>
+                                            </p:txEl>
+                                          </p:spTgt>
+                                        </p:tgtEl>
+                                        <p:attrNameLst>
+                                          <p:attrName>style.visibility</p:attrName>
+                                        </p:attrNameLst>
+                                      </p:cBhvr>
+                                      <p:to>
+                                        <p:strVal val="visible"/>
+                                      </p:to>
+                                    </p:set>
+                                    <p:animEffect transition="in" filter="fade">
+                                      <p:cBhvr>
+                                        <p:cTn id="21" dur="500"/>
+                                        <p:tgtEl>
+                                          <p:spTgt spid="3">
+                                            <p:txEl>
+                                              <p:pRg st="3" end="3"/>
+                                            </p:txEl>
+                                          </p:spTgt>
+                                        </p:tgtEl>
+                                      </p:cBhvr>
+                                    </p:animEffect>
+                                  </p:childTnLst>
+                                </p:cTn>
+                              </p:par>
+                            </p:childTnLst>
+                          </p:cTn>
+                        </p:par>
+                      </p:childTnLst>
+                    </p:cTn>
+                  </p:par>
+                  <p:par>
+                    <p:cTn id="22" fill="hold">
+                      <p:stCondLst>
+                        <p:cond delay="indefinite"/>
+                      </p:stCondLst>
+                      <p:childTnLst>
+                        <p:par>
+                          <p:cTn id="23" fill="hold">
+                            <p:stCondLst>
+                              <p:cond delay="0"/>
+                            </p:stCondLst>
+                            <p:childTnLst>
+                              <p:par>
+                                <p:cTn id="24" presetID="10" presetClass="entr" presetSubtype="0" fill="hold" grpId="0" nodeType="clickEffect">
+                                  <p:stCondLst>
+                                    <p:cond delay="0"/>
+                                  </p:stCondLst>
+                                  <p:childTnLst>
+                                    <p:set>
+                                      <p:cBhvr>
+                                        <p:cTn id="25" dur="1" fill="hold">
+                                          <p:stCondLst>
+                                            <p:cond delay="0"/>
+                                          </p:stCondLst>
+                                        </p:cTn>
+                                        <p:tgtEl>
+                                          <p:spTgt spid="3">
+                                            <p:txEl>
+                                              <p:pRg st="4" end="4"/>
+                                            </p:txEl>
+                                          </p:spTgt>
+                                        </p:tgtEl>
+                                        <p:attrNameLst>
+                                          <p:attrName>style.visibility</p:attrName>
+                                        </p:attrNameLst>
+                                      </p:cBhvr>
+                                      <p:to>
+                                        <p:strVal val="visible"/>
+                                      </p:to>
+                                    </p:set>
+                                    <p:animEffect transition="in" filter="fade">
+                                      <p:cBhvr>
+                                        <p:cTn id="26" dur="500"/>
+                                        <p:tgtEl>
+                                          <p:spTgt spid="3">
+                                            <p:txEl>
+                                              <p:pRg st="4" end="4"/>
+                                            </p:txEl>
+                                          </p:spTgt>
+                                        </p:tgtEl>
+                                      </p:cBhvr>
+                                    </p:animEffect>
+                                  </p:childTnLst>
+                                </p:cTn>
+                              </p:par>
+                              <p:par>
+                                <p:cTn id="27" presetID="10" presetClass="entr" presetSubtype="0" fill="hold" grpId="0" nodeType="withEffect">
+                                  <p:stCondLst>
+                                    <p:cond delay="0"/>
+                                  </p:stCondLst>
+                                  <p:childTnLst>
+                                    <p:set>
+                                      <p:cBhvr>
+                                        <p:cTn id="28" dur="1" fill="hold">
+                                          <p:stCondLst>
+                                            <p:cond delay="0"/>
+                                          </p:stCondLst>
+                                        </p:cTn>
+                                        <p:tgtEl>
+                                          <p:spTgt spid="8"/>
+                                        </p:tgtEl>
+                                        <p:attrNameLst>
+                                          <p:attrName>style.visibility</p:attrName>
+                                        </p:attrNameLst>
+                                      </p:cBhvr>
+                                      <p:to>
+                                        <p:strVal val="visible"/>
+                                      </p:to>
+                                    </p:set>
+                                    <p:animEffect transition="in" filter="fade">
+                                      <p:cBhvr>
+                                        <p:cTn id="29" dur="500"/>
+                                        <p:tgtEl>
+                                          <p:spTgt spid="8"/>
+                                        </p:tgtEl>
+                                      </p:cBhvr>
+                                    </p:animEffect>
+                                  </p:childTnLst>
+                                </p:cTn>
+                              </p:par>
+                            </p:childTnLst>
+                          </p:cTn>
+                        </p:par>
+                      </p:childTnLst>
+                    </p:cTn>
+                  </p:par>
+                </p:childTnLst>
+              </p:cTn>
+              <p:prevCondLst>
+                <p:cond evt="onPrev" delay="0">
+                  <p:tgtEl>
+                    <p:sldTgt/>
+                  </p:tgtEl>
+                </p:cond>
+              </p:prevCondLst>
+              <p:nextCondLst>
+                <p:cond evt="onNext" delay="0">
+                  <p:tgtEl>
+                    <p:sldTgt/>
+                  </p:tgtEl>
+                </p:cond>
+              </p:nextCondLst>
+            </p:seq>
+          </p:childTnLst>
+        </p:cTn>
+      </p:par>
+    </p:tnLst>
+    <p:bldLst>
+      <p:bldP spid="2" grpId="0" animBg="1"/>
+      <p:bldP spid="3" grpId="0" uiExpand="1" build="p"/>
+      <p:bldP spid="8" grpId="0" animBg="1"/>
+    </p:bldLst>
+  </p:timing>
 </p:sld>
 </file>
 

--- a/Gemini_showcase_presentation/Pablo_Bernabeu.pptx
+++ b/Gemini_showcase_presentation/Pablo_Bernabeu.pptx
@@ -165,7 +165,7 @@
 <file path=ppt/revisionInfo.xml><?xml version="1.0" encoding="utf-8"?>
 <p1510:revInfo xmlns:a="http://schemas.openxmlformats.org/drawingml/2006/main" xmlns:r="http://schemas.openxmlformats.org/officeDocument/2006/relationships" xmlns:p1510="http://schemas.microsoft.com/office/powerpoint/2015/10/main">
   <p1510:revLst>
-    <p1510:client id="{CA0E3F24-3540-434E-B16D-7BD1819612DF}" v="48" dt="2025-11-20T07:50:16.368"/>
+    <p1510:client id="{CA0E3F24-3540-434E-B16D-7BD1819612DF}" v="111" dt="2025-11-21T19:50:14.919"/>
   </p1510:revLst>
 </p1510:revInfo>
 </file>
@@ -175,7 +175,7 @@
   <pc:docChgLst>
     <pc:chgData name="Pablo de Juan Bernabeu" userId="c2010ea5-995f-460d-8ec3-ab1cecfcbff4" providerId="ADAL" clId="{72FD2D7A-BC6E-40F6-A002-FFB6E1DDCAB2}"/>
     <pc:docChg chg="undo redo custSel addSld delSld modSld">
-      <pc:chgData name="Pablo de Juan Bernabeu" userId="c2010ea5-995f-460d-8ec3-ab1cecfcbff4" providerId="ADAL" clId="{72FD2D7A-BC6E-40F6-A002-FFB6E1DDCAB2}" dt="2025-11-20T07:50:16.368" v="3347"/>
+      <pc:chgData name="Pablo de Juan Bernabeu" userId="c2010ea5-995f-460d-8ec3-ab1cecfcbff4" providerId="ADAL" clId="{72FD2D7A-BC6E-40F6-A002-FFB6E1DDCAB2}" dt="2025-11-21T19:50:14.918" v="3433" actId="403"/>
       <pc:docMkLst>
         <pc:docMk/>
       </pc:docMkLst>
@@ -203,7 +203,7 @@
         </pc:spChg>
       </pc:sldChg>
       <pc:sldChg chg="addSp modSp mod modAnim">
-        <pc:chgData name="Pablo de Juan Bernabeu" userId="c2010ea5-995f-460d-8ec3-ab1cecfcbff4" providerId="ADAL" clId="{72FD2D7A-BC6E-40F6-A002-FFB6E1DDCAB2}" dt="2025-11-19T12:36:36.155" v="1539" actId="208"/>
+        <pc:chgData name="Pablo de Juan Bernabeu" userId="c2010ea5-995f-460d-8ec3-ab1cecfcbff4" providerId="ADAL" clId="{72FD2D7A-BC6E-40F6-A002-FFB6E1DDCAB2}" dt="2025-11-21T19:50:14.918" v="3433" actId="403"/>
         <pc:sldMkLst>
           <pc:docMk/>
           <pc:sldMk cId="2191625739" sldId="257"/>
@@ -217,7 +217,7 @@
           </ac:spMkLst>
         </pc:spChg>
         <pc:spChg chg="mod">
-          <ac:chgData name="Pablo de Juan Bernabeu" userId="c2010ea5-995f-460d-8ec3-ab1cecfcbff4" providerId="ADAL" clId="{72FD2D7A-BC6E-40F6-A002-FFB6E1DDCAB2}" dt="2025-11-19T12:31:20.914" v="1245" actId="20577"/>
+          <ac:chgData name="Pablo de Juan Bernabeu" userId="c2010ea5-995f-460d-8ec3-ab1cecfcbff4" providerId="ADAL" clId="{72FD2D7A-BC6E-40F6-A002-FFB6E1DDCAB2}" dt="2025-11-21T19:50:14.918" v="3433" actId="403"/>
           <ac:spMkLst>
             <pc:docMk/>
             <pc:sldMk cId="2191625739" sldId="257"/>
@@ -233,7 +233,7 @@
           </ac:cxnSpMkLst>
         </pc:cxnChg>
         <pc:cxnChg chg="add mod">
-          <ac:chgData name="Pablo de Juan Bernabeu" userId="c2010ea5-995f-460d-8ec3-ab1cecfcbff4" providerId="ADAL" clId="{72FD2D7A-BC6E-40F6-A002-FFB6E1DDCAB2}" dt="2025-11-19T12:36:36.155" v="1539" actId="208"/>
+          <ac:chgData name="Pablo de Juan Bernabeu" userId="c2010ea5-995f-460d-8ec3-ab1cecfcbff4" providerId="ADAL" clId="{72FD2D7A-BC6E-40F6-A002-FFB6E1DDCAB2}" dt="2025-11-21T19:48:50.975" v="3389" actId="1035"/>
           <ac:cxnSpMkLst>
             <pc:docMk/>
             <pc:sldMk cId="2191625739" sldId="257"/>
@@ -241,7 +241,7 @@
           </ac:cxnSpMkLst>
         </pc:cxnChg>
         <pc:cxnChg chg="add mod">
-          <ac:chgData name="Pablo de Juan Bernabeu" userId="c2010ea5-995f-460d-8ec3-ab1cecfcbff4" providerId="ADAL" clId="{72FD2D7A-BC6E-40F6-A002-FFB6E1DDCAB2}" dt="2025-11-19T12:36:36.155" v="1539" actId="208"/>
+          <ac:chgData name="Pablo de Juan Bernabeu" userId="c2010ea5-995f-460d-8ec3-ab1cecfcbff4" providerId="ADAL" clId="{72FD2D7A-BC6E-40F6-A002-FFB6E1DDCAB2}" dt="2025-11-21T19:49:26.729" v="3416" actId="1036"/>
           <ac:cxnSpMkLst>
             <pc:docMk/>
             <pc:sldMk cId="2191625739" sldId="257"/>
@@ -341,7 +341,7 @@
         </pc:picChg>
       </pc:sldChg>
       <pc:sldChg chg="addSp delSp modSp mod modAnim">
-        <pc:chgData name="Pablo de Juan Bernabeu" userId="c2010ea5-995f-460d-8ec3-ab1cecfcbff4" providerId="ADAL" clId="{72FD2D7A-BC6E-40F6-A002-FFB6E1DDCAB2}" dt="2025-11-20T07:50:16.368" v="3347"/>
+        <pc:chgData name="Pablo de Juan Bernabeu" userId="c2010ea5-995f-460d-8ec3-ab1cecfcbff4" providerId="ADAL" clId="{72FD2D7A-BC6E-40F6-A002-FFB6E1DDCAB2}" dt="2025-11-20T07:58:49.238" v="3375" actId="20577"/>
         <pc:sldMkLst>
           <pc:docMk/>
           <pc:sldMk cId="286204094" sldId="267"/>
@@ -355,7 +355,7 @@
           </ac:spMkLst>
         </pc:spChg>
         <pc:spChg chg="mod">
-          <ac:chgData name="Pablo de Juan Bernabeu" userId="c2010ea5-995f-460d-8ec3-ab1cecfcbff4" providerId="ADAL" clId="{72FD2D7A-BC6E-40F6-A002-FFB6E1DDCAB2}" dt="2025-11-20T07:47:53.767" v="3332" actId="207"/>
+          <ac:chgData name="Pablo de Juan Bernabeu" userId="c2010ea5-995f-460d-8ec3-ab1cecfcbff4" providerId="ADAL" clId="{72FD2D7A-BC6E-40F6-A002-FFB6E1DDCAB2}" dt="2025-11-20T07:58:39.983" v="3368" actId="20577"/>
           <ac:spMkLst>
             <pc:docMk/>
             <pc:sldMk cId="286204094" sldId="267"/>
@@ -551,7 +551,7 @@
           <a:p>
             <a:fld id="{F5D9695D-5541-4101-9263-982A5DF29015}" type="datetimeFigureOut">
               <a:rPr lang="en-GB" smtClean="0"/>
-              <a:t>20/11/2025</a:t>
+              <a:t>21/11/2025</a:t>
             </a:fld>
             <a:endParaRPr lang="en-GB"/>
           </a:p>
@@ -716,7 +716,7 @@
           <a:p>
             <a:fld id="{0A6BCC6B-FBFB-4DA3-8F77-CCCA17B06474}" type="datetimeFigureOut">
               <a:rPr lang="en-GB" smtClean="0"/>
-              <a:t>20/11/2025</a:t>
+              <a:t>21/11/2025</a:t>
             </a:fld>
             <a:endParaRPr lang="en-GB"/>
           </a:p>
@@ -6802,7 +6802,7 @@
             </a:r>
           </a:p>
           <a:p>
-            <a:endParaRPr lang="en-GB" sz="2000" dirty="0"/>
+            <a:endParaRPr lang="en-GB" sz="1400" dirty="0"/>
           </a:p>
           <a:p>
             <a:r>
@@ -6837,7 +6837,7 @@
             </a:r>
           </a:p>
           <a:p>
-            <a:endParaRPr lang="en-GB" sz="2700" dirty="0"/>
+            <a:endParaRPr lang="en-GB" sz="3200" dirty="0"/>
           </a:p>
           <a:p>
             <a:r>
@@ -6872,6 +6872,9 @@
               <a:rPr lang="en-GB" sz="1500" dirty="0"/>
               <a:t>.</a:t>
             </a:r>
+          </a:p>
+          <a:p>
+            <a:endParaRPr lang="en-GB" sz="300" dirty="0"/>
           </a:p>
           <a:p>
             <a:r>
@@ -6944,7 +6947,7 @@
         </p:nvCxnSpPr>
         <p:spPr>
           <a:xfrm>
-            <a:off x="2740695" y="1587048"/>
+            <a:off x="2740695" y="1528269"/>
             <a:ext cx="720000" cy="0"/>
           </a:xfrm>
           <a:prstGeom prst="straightConnector1">
@@ -6989,7 +6992,7 @@
         </p:nvCxnSpPr>
         <p:spPr>
           <a:xfrm>
-            <a:off x="2725455" y="2882448"/>
+            <a:off x="2725455" y="2751820"/>
             <a:ext cx="720000" cy="0"/>
           </a:xfrm>
           <a:prstGeom prst="straightConnector1">
@@ -7596,7 +7599,7 @@
                                         <p:tgtEl>
                                           <p:spTgt spid="3">
                                             <p:txEl>
-                                              <p:pRg st="7" end="7"/>
+                                              <p:pRg st="8" end="8"/>
                                             </p:txEl>
                                           </p:spTgt>
                                         </p:tgtEl>
@@ -7614,7 +7617,7 @@
                                         <p:tgtEl>
                                           <p:spTgt spid="3">
                                             <p:txEl>
-                                              <p:pRg st="7" end="7"/>
+                                              <p:pRg st="8" end="8"/>
                                             </p:txEl>
                                           </p:spTgt>
                                         </p:tgtEl>
